--- a/docs/orinayo.pptx
+++ b/docs/orinayo.pptx
@@ -265,7 +265,7 @@
           <a:p>
             <a:fld id="{CBF99764-E7B3-46D4-A6AA-8494586ACAE2}" type="datetimeFigureOut">
               <a:rPr lang="en-GB" smtClean="0"/>
-              <a:t>23/01/2026</a:t>
+              <a:t>26/06/2026</a:t>
             </a:fld>
             <a:endParaRPr lang="en-GB"/>
           </a:p>
@@ -465,7 +465,7 @@
           <a:p>
             <a:fld id="{CBF99764-E7B3-46D4-A6AA-8494586ACAE2}" type="datetimeFigureOut">
               <a:rPr lang="en-GB" smtClean="0"/>
-              <a:t>23/01/2026</a:t>
+              <a:t>26/06/2026</a:t>
             </a:fld>
             <a:endParaRPr lang="en-GB"/>
           </a:p>
@@ -675,7 +675,7 @@
           <a:p>
             <a:fld id="{CBF99764-E7B3-46D4-A6AA-8494586ACAE2}" type="datetimeFigureOut">
               <a:rPr lang="en-GB" smtClean="0"/>
-              <a:t>23/01/2026</a:t>
+              <a:t>26/06/2026</a:t>
             </a:fld>
             <a:endParaRPr lang="en-GB"/>
           </a:p>
@@ -875,7 +875,7 @@
           <a:p>
             <a:fld id="{CBF99764-E7B3-46D4-A6AA-8494586ACAE2}" type="datetimeFigureOut">
               <a:rPr lang="en-GB" smtClean="0"/>
-              <a:t>23/01/2026</a:t>
+              <a:t>26/06/2026</a:t>
             </a:fld>
             <a:endParaRPr lang="en-GB"/>
           </a:p>
@@ -1151,7 +1151,7 @@
           <a:p>
             <a:fld id="{CBF99764-E7B3-46D4-A6AA-8494586ACAE2}" type="datetimeFigureOut">
               <a:rPr lang="en-GB" smtClean="0"/>
-              <a:t>23/01/2026</a:t>
+              <a:t>26/06/2026</a:t>
             </a:fld>
             <a:endParaRPr lang="en-GB"/>
           </a:p>
@@ -1419,7 +1419,7 @@
           <a:p>
             <a:fld id="{CBF99764-E7B3-46D4-A6AA-8494586ACAE2}" type="datetimeFigureOut">
               <a:rPr lang="en-GB" smtClean="0"/>
-              <a:t>23/01/2026</a:t>
+              <a:t>26/06/2026</a:t>
             </a:fld>
             <a:endParaRPr lang="en-GB"/>
           </a:p>
@@ -1834,7 +1834,7 @@
           <a:p>
             <a:fld id="{CBF99764-E7B3-46D4-A6AA-8494586ACAE2}" type="datetimeFigureOut">
               <a:rPr lang="en-GB" smtClean="0"/>
-              <a:t>23/01/2026</a:t>
+              <a:t>26/06/2026</a:t>
             </a:fld>
             <a:endParaRPr lang="en-GB"/>
           </a:p>
@@ -1976,7 +1976,7 @@
           <a:p>
             <a:fld id="{CBF99764-E7B3-46D4-A6AA-8494586ACAE2}" type="datetimeFigureOut">
               <a:rPr lang="en-GB" smtClean="0"/>
-              <a:t>23/01/2026</a:t>
+              <a:t>26/06/2026</a:t>
             </a:fld>
             <a:endParaRPr lang="en-GB"/>
           </a:p>
@@ -2089,7 +2089,7 @@
           <a:p>
             <a:fld id="{CBF99764-E7B3-46D4-A6AA-8494586ACAE2}" type="datetimeFigureOut">
               <a:rPr lang="en-GB" smtClean="0"/>
-              <a:t>23/01/2026</a:t>
+              <a:t>26/06/2026</a:t>
             </a:fld>
             <a:endParaRPr lang="en-GB"/>
           </a:p>
@@ -2402,7 +2402,7 @@
           <a:p>
             <a:fld id="{CBF99764-E7B3-46D4-A6AA-8494586ACAE2}" type="datetimeFigureOut">
               <a:rPr lang="en-GB" smtClean="0"/>
-              <a:t>23/01/2026</a:t>
+              <a:t>26/06/2026</a:t>
             </a:fld>
             <a:endParaRPr lang="en-GB"/>
           </a:p>
@@ -2691,7 +2691,7 @@
           <a:p>
             <a:fld id="{CBF99764-E7B3-46D4-A6AA-8494586ACAE2}" type="datetimeFigureOut">
               <a:rPr lang="en-GB" smtClean="0"/>
-              <a:t>23/01/2026</a:t>
+              <a:t>26/06/2026</a:t>
             </a:fld>
             <a:endParaRPr lang="en-GB"/>
           </a:p>
@@ -2934,7 +2934,7 @@
           <a:p>
             <a:fld id="{CBF99764-E7B3-46D4-A6AA-8494586ACAE2}" type="datetimeFigureOut">
               <a:rPr lang="en-GB" smtClean="0"/>
-              <a:t>23/01/2026</a:t>
+              <a:t>26/06/2026</a:t>
             </a:fld>
             <a:endParaRPr lang="en-GB"/>
           </a:p>
@@ -3515,7 +3515,7 @@
         <p:spPr>
           <a:xfrm>
             <a:off x="1741298" y="5647674"/>
-            <a:ext cx="2953442" cy="276999"/>
+            <a:ext cx="6287580" cy="276999"/>
           </a:xfrm>
           <a:prstGeom prst="rect">
             <a:avLst/>
@@ -3530,7 +3530,7 @@
           <a:p>
             <a:r>
               <a:rPr lang="en-GB" sz="1200" dirty="0"/>
-              <a:t>Start/Stop</a:t>
+              <a:t>Start/Stop Midi/Audio Styles + Backing Track</a:t>
             </a:r>
           </a:p>
         </p:txBody>
@@ -3607,7 +3607,7 @@
           <a:p>
             <a:r>
               <a:rPr lang="en-GB" sz="1200" dirty="0"/>
-              <a:t>Break Drumbeat</a:t>
+              <a:t>Volume Control Joystick. Press to reset</a:t>
             </a:r>
           </a:p>
         </p:txBody>
@@ -3739,7 +3739,15 @@
           <a:p>
             <a:r>
               <a:rPr lang="en-GB" sz="1200" dirty="0"/>
-              <a:t>Fill Drumbeat</a:t>
+              <a:t>Fil/</a:t>
+            </a:r>
+            <a:r>
+              <a:rPr lang="en-GB" sz="1200" dirty="0" err="1"/>
+              <a:t>Breakl</a:t>
+            </a:r>
+            <a:r>
+              <a:rPr lang="en-GB" sz="1200" dirty="0"/>
+              <a:t> Drumbeat</a:t>
             </a:r>
           </a:p>
         </p:txBody>
@@ -4286,7 +4294,7 @@
         <p:spPr>
           <a:xfrm>
             <a:off x="10243407" y="1470330"/>
-            <a:ext cx="1948593" cy="461665"/>
+            <a:ext cx="1948593" cy="276999"/>
           </a:xfrm>
           <a:prstGeom prst="rect">
             <a:avLst/>
@@ -4301,14 +4309,7 @@
           <a:p>
             <a:r>
               <a:rPr lang="en-GB" sz="1200" dirty="0"/>
-              <a:t>Transpose</a:t>
-            </a:r>
-            <a:br>
-              <a:rPr lang="en-GB" sz="1200" dirty="0"/>
-            </a:br>
-            <a:r>
-              <a:rPr lang="en-GB" sz="1200" dirty="0"/>
-              <a:t>UP / DOWN</a:t>
+              <a:t>Transpose UP</a:t>
             </a:r>
           </a:p>
         </p:txBody>
@@ -4370,7 +4371,7 @@
         <p:spPr>
           <a:xfrm>
             <a:off x="523126" y="6123647"/>
-            <a:ext cx="9545001" cy="461665"/>
+            <a:ext cx="11843575" cy="646331"/>
           </a:xfrm>
           <a:prstGeom prst="rect">
             <a:avLst/>
@@ -4438,6 +4439,57 @@
               <a:rPr lang="en-GB" sz="1200" dirty="0"/>
               <a:t> – MODX/Montage M</a:t>
             </a:r>
+          </a:p>
+          <a:p>
+            <a:r>
+              <a:rPr lang="en-GB" sz="1200" b="1" dirty="0" err="1"/>
+              <a:t>Green:Red</a:t>
+            </a:r>
+            <a:r>
+              <a:rPr lang="en-GB" sz="1200" dirty="0"/>
+              <a:t> – Midi Guitar, </a:t>
+            </a:r>
+            <a:r>
+              <a:rPr lang="en-GB" sz="1200" b="1" dirty="0" err="1"/>
+              <a:t>Green:Blue</a:t>
+            </a:r>
+            <a:r>
+              <a:rPr lang="en-GB" sz="1200" dirty="0"/>
+              <a:t> – Audio Styles, </a:t>
+            </a:r>
+            <a:r>
+              <a:rPr lang="en-GB" sz="1200" b="1" dirty="0" err="1"/>
+              <a:t>Red:Orange</a:t>
+            </a:r>
+            <a:r>
+              <a:rPr lang="en-GB" sz="1200" dirty="0"/>
+              <a:t> – </a:t>
+            </a:r>
+            <a:r>
+              <a:rPr lang="en-GB" sz="1200" dirty="0" err="1"/>
+              <a:t>Nanobox</a:t>
+            </a:r>
+            <a:r>
+              <a:rPr lang="en-GB" sz="1200" dirty="0"/>
+              <a:t> Tangerine, </a:t>
+            </a:r>
+            <a:r>
+              <a:rPr lang="en-GB" sz="1200" b="1" dirty="0" err="1"/>
+              <a:t>Red:Blue</a:t>
+            </a:r>
+            <a:r>
+              <a:rPr lang="en-GB" sz="1200" dirty="0"/>
+              <a:t> – Akai MPC Sample, </a:t>
+            </a:r>
+            <a:r>
+              <a:rPr lang="en-GB" sz="1200" b="1" dirty="0" err="1"/>
+              <a:t>Yellow:Orange</a:t>
+            </a:r>
+            <a:r>
+              <a:rPr lang="en-GB" sz="1200" dirty="0"/>
+              <a:t> –Roland SP404 mk2</a:t>
+            </a:r>
+            <a:endParaRPr lang="en-GB" sz="1200" b="1" dirty="0"/>
           </a:p>
         </p:txBody>
       </p:sp>
@@ -4618,14 +4670,14 @@
           <p:nvPr>
             <p:extLst>
               <p:ext uri="{D42A27DB-BD31-4B8C-83A1-F6EECF244321}">
-                <p14:modId xmlns:p14="http://schemas.microsoft.com/office/powerpoint/2010/main" val="349770477"/>
+                <p14:modId xmlns:p14="http://schemas.microsoft.com/office/powerpoint/2010/main" val="3656713799"/>
               </p:ext>
             </p:extLst>
           </p:nvPr>
         </p:nvGraphicFramePr>
         <p:xfrm>
           <a:off x="1214984" y="449237"/>
-          <a:ext cx="8868414" cy="5191760"/>
+          <a:ext cx="8868414" cy="6304280"/>
         </p:xfrm>
         <a:graphic>
           <a:graphicData uri="http://schemas.openxmlformats.org/drawingml/2006/table">
@@ -4685,15 +4737,7 @@
                     <a:p>
                       <a:r>
                         <a:rPr lang="en-GB" dirty="0"/>
-                        <a:t>Whammy Bar (</a:t>
-                      </a:r>
-                      <a:r>
-                        <a:rPr lang="en-GB" dirty="0" err="1"/>
-                        <a:t>prev</a:t>
-                      </a:r>
-                      <a:r>
-                        <a:rPr lang="en-GB" dirty="0"/>
-                        <a:t>)</a:t>
+                        <a:t>Whammy Bar</a:t>
                       </a:r>
                     </a:p>
                   </a:txBody>
@@ -4805,6 +4849,119 @@
                     <a:p>
                       <a:r>
                         <a:rPr lang="en-GB" dirty="0"/>
+                        <a:t>Suspend Play/Notes</a:t>
+                      </a:r>
+                    </a:p>
+                  </a:txBody>
+                  <a:tcPr/>
+                </a:tc>
+                <a:tc>
+                  <a:txBody>
+                    <a:bodyPr/>
+                    <a:lstStyle/>
+                    <a:p>
+                      <a:endParaRPr lang="en-GB" dirty="0">
+                        <a:solidFill>
+                          <a:schemeClr val="bg1"/>
+                        </a:solidFill>
+                      </a:endParaRPr>
+                    </a:p>
+                  </a:txBody>
+                  <a:tcPr>
+                    <a:solidFill>
+                      <a:schemeClr val="accent6"/>
+                    </a:solidFill>
+                  </a:tcPr>
+                </a:tc>
+                <a:tc>
+                  <a:txBody>
+                    <a:bodyPr/>
+                    <a:lstStyle/>
+                    <a:p>
+                      <a:endParaRPr lang="en-GB" dirty="0">
+                        <a:solidFill>
+                          <a:schemeClr val="bg1"/>
+                        </a:solidFill>
+                      </a:endParaRPr>
+                    </a:p>
+                  </a:txBody>
+                  <a:tcPr>
+                    <a:solidFill>
+                      <a:srgbClr val="C00000"/>
+                    </a:solidFill>
+                  </a:tcPr>
+                </a:tc>
+                <a:tc>
+                  <a:txBody>
+                    <a:bodyPr/>
+                    <a:lstStyle/>
+                    <a:p>
+                      <a:endParaRPr lang="en-GB">
+                        <a:solidFill>
+                          <a:schemeClr val="bg1"/>
+                        </a:solidFill>
+                      </a:endParaRPr>
+                    </a:p>
+                  </a:txBody>
+                  <a:tcPr>
+                    <a:solidFill>
+                      <a:srgbClr val="FFC000"/>
+                    </a:solidFill>
+                  </a:tcPr>
+                </a:tc>
+                <a:tc>
+                  <a:txBody>
+                    <a:bodyPr/>
+                    <a:lstStyle/>
+                    <a:p>
+                      <a:endParaRPr lang="en-GB">
+                        <a:solidFill>
+                          <a:schemeClr val="bg1"/>
+                        </a:solidFill>
+                      </a:endParaRPr>
+                    </a:p>
+                  </a:txBody>
+                  <a:tcPr>
+                    <a:solidFill>
+                      <a:srgbClr val="0070C0"/>
+                    </a:solidFill>
+                  </a:tcPr>
+                </a:tc>
+                <a:tc>
+                  <a:txBody>
+                    <a:bodyPr/>
+                    <a:lstStyle/>
+                    <a:p>
+                      <a:endParaRPr lang="en-GB" dirty="0">
+                        <a:solidFill>
+                          <a:schemeClr val="bg1"/>
+                        </a:solidFill>
+                      </a:endParaRPr>
+                    </a:p>
+                  </a:txBody>
+                  <a:tcPr>
+                    <a:solidFill>
+                      <a:schemeClr val="accent2">
+                        <a:lumMod val="60000"/>
+                        <a:lumOff val="40000"/>
+                      </a:schemeClr>
+                    </a:solidFill>
+                  </a:tcPr>
+                </a:tc>
+                <a:extLst>
+                  <a:ext uri="{0D108BD9-81ED-4DB2-BD59-A6C34878D82A}">
+                    <a16:rowId xmlns:a16="http://schemas.microsoft.com/office/drawing/2014/main" val="1713673069"/>
+                  </a:ext>
+                </a:extLst>
+              </a:tr>
+              <a:tr h="370840">
+                <a:tc>
+                  <a:txBody>
+                    <a:bodyPr/>
+                    <a:lstStyle/>
+                    <a:p>
+                      <a:r>
+                        <a:rPr lang="en-GB" dirty="0"/>
                         <a:t>Strum Up/Down</a:t>
                       </a:r>
                     </a:p>
@@ -4817,7 +4974,11 @@
                     <a:lstStyle/>
                     <a:p>
                       <a:r>
-                        <a:rPr lang="en-GB" dirty="0"/>
+                        <a:rPr lang="en-GB" dirty="0">
+                          <a:solidFill>
+                            <a:schemeClr val="bg1"/>
+                          </a:solidFill>
+                        </a:rPr>
                         <a:t>X</a:t>
                       </a:r>
                     </a:p>
@@ -4833,7 +4994,11 @@
                     <a:bodyPr/>
                     <a:lstStyle/>
                     <a:p>
-                      <a:endParaRPr lang="en-GB" dirty="0"/>
+                      <a:endParaRPr lang="en-GB" dirty="0">
+                        <a:solidFill>
+                          <a:schemeClr val="bg1"/>
+                        </a:solidFill>
+                      </a:endParaRPr>
                     </a:p>
                   </a:txBody>
                   <a:tcPr>
@@ -4847,7 +5012,11 @@
                     <a:bodyPr/>
                     <a:lstStyle/>
                     <a:p>
-                      <a:endParaRPr lang="en-GB"/>
+                      <a:endParaRPr lang="en-GB">
+                        <a:solidFill>
+                          <a:schemeClr val="bg1"/>
+                        </a:solidFill>
+                      </a:endParaRPr>
                     </a:p>
                   </a:txBody>
                   <a:tcPr>
@@ -4861,7 +5030,11 @@
                     <a:bodyPr/>
                     <a:lstStyle/>
                     <a:p>
-                      <a:endParaRPr lang="en-GB"/>
+                      <a:endParaRPr lang="en-GB">
+                        <a:solidFill>
+                          <a:schemeClr val="bg1"/>
+                        </a:solidFill>
+                      </a:endParaRPr>
                     </a:p>
                   </a:txBody>
                   <a:tcPr>
@@ -4875,7 +5048,11 @@
                     <a:bodyPr/>
                     <a:lstStyle/>
                     <a:p>
-                      <a:endParaRPr lang="en-GB"/>
+                      <a:endParaRPr lang="en-GB" dirty="0">
+                        <a:solidFill>
+                          <a:schemeClr val="bg1"/>
+                        </a:solidFill>
+                      </a:endParaRPr>
                     </a:p>
                   </a:txBody>
                   <a:tcPr>
@@ -4912,7 +5089,11 @@
                     <a:bodyPr/>
                     <a:lstStyle/>
                     <a:p>
-                      <a:endParaRPr lang="en-GB" dirty="0"/>
+                      <a:endParaRPr lang="en-GB" dirty="0">
+                        <a:solidFill>
+                          <a:schemeClr val="bg1"/>
+                        </a:solidFill>
+                      </a:endParaRPr>
                     </a:p>
                   </a:txBody>
                   <a:tcPr>
@@ -4927,7 +5108,11 @@
                     <a:lstStyle/>
                     <a:p>
                       <a:r>
-                        <a:rPr lang="en-GB" dirty="0"/>
+                        <a:rPr lang="en-GB" dirty="0">
+                          <a:solidFill>
+                            <a:schemeClr val="bg1"/>
+                          </a:solidFill>
+                        </a:rPr>
                         <a:t>X</a:t>
                       </a:r>
                     </a:p>
@@ -4943,7 +5128,11 @@
                     <a:bodyPr/>
                     <a:lstStyle/>
                     <a:p>
-                      <a:endParaRPr lang="en-GB"/>
+                      <a:endParaRPr lang="en-GB">
+                        <a:solidFill>
+                          <a:schemeClr val="bg1"/>
+                        </a:solidFill>
+                      </a:endParaRPr>
                     </a:p>
                   </a:txBody>
                   <a:tcPr>
@@ -4957,7 +5146,11 @@
                     <a:bodyPr/>
                     <a:lstStyle/>
                     <a:p>
-                      <a:endParaRPr lang="en-GB"/>
+                      <a:endParaRPr lang="en-GB">
+                        <a:solidFill>
+                          <a:schemeClr val="bg1"/>
+                        </a:solidFill>
+                      </a:endParaRPr>
                     </a:p>
                   </a:txBody>
                   <a:tcPr>
@@ -4971,7 +5164,11 @@
                     <a:bodyPr/>
                     <a:lstStyle/>
                     <a:p>
-                      <a:endParaRPr lang="en-GB"/>
+                      <a:endParaRPr lang="en-GB">
+                        <a:solidFill>
+                          <a:schemeClr val="bg1"/>
+                        </a:solidFill>
+                      </a:endParaRPr>
                     </a:p>
                   </a:txBody>
                   <a:tcPr>
@@ -5008,7 +5205,11 @@
                     <a:bodyPr/>
                     <a:lstStyle/>
                     <a:p>
-                      <a:endParaRPr lang="en-GB" dirty="0"/>
+                      <a:endParaRPr lang="en-GB" dirty="0">
+                        <a:solidFill>
+                          <a:schemeClr val="bg1"/>
+                        </a:solidFill>
+                      </a:endParaRPr>
                     </a:p>
                   </a:txBody>
                   <a:tcPr>
@@ -5022,7 +5223,11 @@
                     <a:bodyPr/>
                     <a:lstStyle/>
                     <a:p>
-                      <a:endParaRPr lang="en-GB" dirty="0"/>
+                      <a:endParaRPr lang="en-GB" dirty="0">
+                        <a:solidFill>
+                          <a:schemeClr val="bg1"/>
+                        </a:solidFill>
+                      </a:endParaRPr>
                     </a:p>
                   </a:txBody>
                   <a:tcPr>
@@ -5037,7 +5242,11 @@
                     <a:lstStyle/>
                     <a:p>
                       <a:r>
-                        <a:rPr lang="en-GB" dirty="0"/>
+                        <a:rPr lang="en-GB" dirty="0">
+                          <a:solidFill>
+                            <a:schemeClr val="bg1"/>
+                          </a:solidFill>
+                        </a:rPr>
                         <a:t>X</a:t>
                       </a:r>
                     </a:p>
@@ -5053,7 +5262,11 @@
                     <a:bodyPr/>
                     <a:lstStyle/>
                     <a:p>
-                      <a:endParaRPr lang="en-GB"/>
+                      <a:endParaRPr lang="en-GB">
+                        <a:solidFill>
+                          <a:schemeClr val="bg1"/>
+                        </a:solidFill>
+                      </a:endParaRPr>
                     </a:p>
                   </a:txBody>
                   <a:tcPr>
@@ -5067,7 +5280,11 @@
                     <a:bodyPr/>
                     <a:lstStyle/>
                     <a:p>
-                      <a:endParaRPr lang="en-GB"/>
+                      <a:endParaRPr lang="en-GB">
+                        <a:solidFill>
+                          <a:schemeClr val="bg1"/>
+                        </a:solidFill>
+                      </a:endParaRPr>
                     </a:p>
                   </a:txBody>
                   <a:tcPr>
@@ -5121,7 +5338,11 @@
                     <a:bodyPr/>
                     <a:lstStyle/>
                     <a:p>
-                      <a:endParaRPr lang="en-GB" dirty="0"/>
+                      <a:endParaRPr lang="en-GB" dirty="0">
+                        <a:solidFill>
+                          <a:schemeClr val="bg1"/>
+                        </a:solidFill>
+                      </a:endParaRPr>
                     </a:p>
                   </a:txBody>
                   <a:tcPr>
@@ -5135,7 +5356,11 @@
                     <a:bodyPr/>
                     <a:lstStyle/>
                     <a:p>
-                      <a:endParaRPr lang="en-GB"/>
+                      <a:endParaRPr lang="en-GB">
+                        <a:solidFill>
+                          <a:schemeClr val="bg1"/>
+                        </a:solidFill>
+                      </a:endParaRPr>
                     </a:p>
                   </a:txBody>
                   <a:tcPr>
@@ -5149,7 +5374,11 @@
                     <a:bodyPr/>
                     <a:lstStyle/>
                     <a:p>
-                      <a:endParaRPr lang="en-GB"/>
+                      <a:endParaRPr lang="en-GB">
+                        <a:solidFill>
+                          <a:schemeClr val="bg1"/>
+                        </a:solidFill>
+                      </a:endParaRPr>
                     </a:p>
                   </a:txBody>
                   <a:tcPr>
@@ -5164,7 +5393,11 @@
                     <a:lstStyle/>
                     <a:p>
                       <a:r>
-                        <a:rPr lang="en-GB" dirty="0"/>
+                        <a:rPr lang="en-GB" dirty="0">
+                          <a:solidFill>
+                            <a:schemeClr val="bg1"/>
+                          </a:solidFill>
+                        </a:rPr>
                         <a:t>X</a:t>
                       </a:r>
                     </a:p>
@@ -5180,7 +5413,11 @@
                     <a:bodyPr/>
                     <a:lstStyle/>
                     <a:p>
-                      <a:endParaRPr lang="en-GB"/>
+                      <a:endParaRPr lang="en-GB">
+                        <a:solidFill>
+                          <a:schemeClr val="bg1"/>
+                        </a:solidFill>
+                      </a:endParaRPr>
                     </a:p>
                   </a:txBody>
                   <a:tcPr>
@@ -5234,7 +5471,11 @@
                     <a:bodyPr/>
                     <a:lstStyle/>
                     <a:p>
-                      <a:endParaRPr lang="en-GB" dirty="0"/>
+                      <a:endParaRPr lang="en-GB" dirty="0">
+                        <a:solidFill>
+                          <a:schemeClr val="bg1"/>
+                        </a:solidFill>
+                      </a:endParaRPr>
                     </a:p>
                   </a:txBody>
                   <a:tcPr>
@@ -5248,7 +5489,11 @@
                     <a:bodyPr/>
                     <a:lstStyle/>
                     <a:p>
-                      <a:endParaRPr lang="en-GB"/>
+                      <a:endParaRPr lang="en-GB">
+                        <a:solidFill>
+                          <a:schemeClr val="bg1"/>
+                        </a:solidFill>
+                      </a:endParaRPr>
                     </a:p>
                   </a:txBody>
                   <a:tcPr>
@@ -5262,7 +5507,11 @@
                     <a:bodyPr/>
                     <a:lstStyle/>
                     <a:p>
-                      <a:endParaRPr lang="en-GB"/>
+                      <a:endParaRPr lang="en-GB">
+                        <a:solidFill>
+                          <a:schemeClr val="bg1"/>
+                        </a:solidFill>
+                      </a:endParaRPr>
                     </a:p>
                   </a:txBody>
                   <a:tcPr>
@@ -5276,7 +5525,11 @@
                     <a:bodyPr/>
                     <a:lstStyle/>
                     <a:p>
-                      <a:endParaRPr lang="en-GB"/>
+                      <a:endParaRPr lang="en-GB">
+                        <a:solidFill>
+                          <a:schemeClr val="bg1"/>
+                        </a:solidFill>
+                      </a:endParaRPr>
                     </a:p>
                   </a:txBody>
                   <a:tcPr>
@@ -5291,7 +5544,11 @@
                     <a:lstStyle/>
                     <a:p>
                       <a:r>
-                        <a:rPr lang="en-GB" dirty="0"/>
+                        <a:rPr lang="en-GB" dirty="0">
+                          <a:solidFill>
+                            <a:schemeClr val="bg1"/>
+                          </a:solidFill>
+                        </a:rPr>
                         <a:t>X</a:t>
                       </a:r>
                     </a:p>
@@ -5348,7 +5605,11 @@
                     <a:lstStyle/>
                     <a:p>
                       <a:r>
-                        <a:rPr lang="en-GB" dirty="0"/>
+                        <a:rPr lang="en-GB" dirty="0">
+                          <a:solidFill>
+                            <a:schemeClr val="bg1"/>
+                          </a:solidFill>
+                        </a:rPr>
                         <a:t>X</a:t>
                       </a:r>
                     </a:p>
@@ -5365,7 +5626,11 @@
                     <a:lstStyle/>
                     <a:p>
                       <a:r>
-                        <a:rPr lang="en-GB" dirty="0"/>
+                        <a:rPr lang="en-GB" dirty="0">
+                          <a:solidFill>
+                            <a:schemeClr val="bg1"/>
+                          </a:solidFill>
+                        </a:rPr>
                         <a:t>X</a:t>
                       </a:r>
                     </a:p>
@@ -5381,7 +5646,11 @@
                     <a:bodyPr/>
                     <a:lstStyle/>
                     <a:p>
-                      <a:endParaRPr lang="en-GB"/>
+                      <a:endParaRPr lang="en-GB">
+                        <a:solidFill>
+                          <a:schemeClr val="bg1"/>
+                        </a:solidFill>
+                      </a:endParaRPr>
                     </a:p>
                   </a:txBody>
                   <a:tcPr>
@@ -5395,7 +5664,11 @@
                     <a:bodyPr/>
                     <a:lstStyle/>
                     <a:p>
-                      <a:endParaRPr lang="en-GB"/>
+                      <a:endParaRPr lang="en-GB">
+                        <a:solidFill>
+                          <a:schemeClr val="bg1"/>
+                        </a:solidFill>
+                      </a:endParaRPr>
                     </a:p>
                   </a:txBody>
                   <a:tcPr>
@@ -5409,7 +5682,11 @@
                     <a:bodyPr/>
                     <a:lstStyle/>
                     <a:p>
-                      <a:endParaRPr lang="en-GB" dirty="0"/>
+                      <a:endParaRPr lang="en-GB" dirty="0">
+                        <a:solidFill>
+                          <a:schemeClr val="bg1"/>
+                        </a:solidFill>
+                      </a:endParaRPr>
                     </a:p>
                   </a:txBody>
                   <a:tcPr>
@@ -5463,7 +5740,11 @@
                     <a:bodyPr/>
                     <a:lstStyle/>
                     <a:p>
-                      <a:endParaRPr lang="en-GB" dirty="0"/>
+                      <a:endParaRPr lang="en-GB" dirty="0">
+                        <a:solidFill>
+                          <a:schemeClr val="bg1"/>
+                        </a:solidFill>
+                      </a:endParaRPr>
                     </a:p>
                   </a:txBody>
                   <a:tcPr>
@@ -5478,7 +5759,11 @@
                     <a:lstStyle/>
                     <a:p>
                       <a:r>
-                        <a:rPr lang="en-GB" dirty="0"/>
+                        <a:rPr lang="en-GB" dirty="0">
+                          <a:solidFill>
+                            <a:schemeClr val="bg1"/>
+                          </a:solidFill>
+                        </a:rPr>
                         <a:t>X</a:t>
                       </a:r>
                     </a:p>
@@ -5495,7 +5780,11 @@
                     <a:lstStyle/>
                     <a:p>
                       <a:r>
-                        <a:rPr lang="en-GB" dirty="0"/>
+                        <a:rPr lang="en-GB" dirty="0">
+                          <a:solidFill>
+                            <a:schemeClr val="bg1"/>
+                          </a:solidFill>
+                        </a:rPr>
                         <a:t>X</a:t>
                       </a:r>
                     </a:p>
@@ -5511,7 +5800,11 @@
                     <a:bodyPr/>
                     <a:lstStyle/>
                     <a:p>
-                      <a:endParaRPr lang="en-GB"/>
+                      <a:endParaRPr lang="en-GB">
+                        <a:solidFill>
+                          <a:schemeClr val="bg1"/>
+                        </a:solidFill>
+                      </a:endParaRPr>
                     </a:p>
                   </a:txBody>
                   <a:tcPr>
@@ -5525,7 +5818,11 @@
                     <a:bodyPr/>
                     <a:lstStyle/>
                     <a:p>
-                      <a:endParaRPr lang="en-GB" dirty="0"/>
+                      <a:endParaRPr lang="en-GB" dirty="0">
+                        <a:solidFill>
+                          <a:schemeClr val="bg1"/>
+                        </a:solidFill>
+                      </a:endParaRPr>
                     </a:p>
                   </a:txBody>
                   <a:tcPr>
@@ -5579,7 +5876,11 @@
                     <a:bodyPr/>
                     <a:lstStyle/>
                     <a:p>
-                      <a:endParaRPr lang="en-GB" dirty="0"/>
+                      <a:endParaRPr lang="en-GB" dirty="0">
+                        <a:solidFill>
+                          <a:schemeClr val="bg1"/>
+                        </a:solidFill>
+                      </a:endParaRPr>
                     </a:p>
                   </a:txBody>
                   <a:tcPr>
@@ -5593,7 +5894,11 @@
                     <a:bodyPr/>
                     <a:lstStyle/>
                     <a:p>
-                      <a:endParaRPr lang="en-GB"/>
+                      <a:endParaRPr lang="en-GB">
+                        <a:solidFill>
+                          <a:schemeClr val="bg1"/>
+                        </a:solidFill>
+                      </a:endParaRPr>
                     </a:p>
                   </a:txBody>
                   <a:tcPr>
@@ -5608,7 +5913,11 @@
                     <a:lstStyle/>
                     <a:p>
                       <a:r>
-                        <a:rPr lang="en-GB" dirty="0"/>
+                        <a:rPr lang="en-GB" dirty="0">
+                          <a:solidFill>
+                            <a:schemeClr val="bg1"/>
+                          </a:solidFill>
+                        </a:rPr>
                         <a:t>X</a:t>
                       </a:r>
                     </a:p>
@@ -5625,7 +5934,11 @@
                     <a:lstStyle/>
                     <a:p>
                       <a:r>
-                        <a:rPr lang="en-GB" dirty="0"/>
+                        <a:rPr lang="en-GB" dirty="0">
+                          <a:solidFill>
+                            <a:schemeClr val="bg1"/>
+                          </a:solidFill>
+                        </a:rPr>
                         <a:t>X</a:t>
                       </a:r>
                     </a:p>
@@ -5641,7 +5954,11 @@
                     <a:bodyPr/>
                     <a:lstStyle/>
                     <a:p>
-                      <a:endParaRPr lang="en-GB" dirty="0"/>
+                      <a:endParaRPr lang="en-GB" dirty="0">
+                        <a:solidFill>
+                          <a:schemeClr val="bg1"/>
+                        </a:solidFill>
+                      </a:endParaRPr>
                     </a:p>
                   </a:txBody>
                   <a:tcPr>
@@ -5695,7 +6012,11 @@
                     <a:bodyPr/>
                     <a:lstStyle/>
                     <a:p>
-                      <a:endParaRPr lang="en-GB" dirty="0"/>
+                      <a:endParaRPr lang="en-GB" dirty="0">
+                        <a:solidFill>
+                          <a:schemeClr val="bg1"/>
+                        </a:solidFill>
+                      </a:endParaRPr>
                     </a:p>
                   </a:txBody>
                   <a:tcPr>
@@ -5709,7 +6030,11 @@
                     <a:bodyPr/>
                     <a:lstStyle/>
                     <a:p>
-                      <a:endParaRPr lang="en-GB"/>
+                      <a:endParaRPr lang="en-GB">
+                        <a:solidFill>
+                          <a:schemeClr val="bg1"/>
+                        </a:solidFill>
+                      </a:endParaRPr>
                     </a:p>
                   </a:txBody>
                   <a:tcPr>
@@ -5723,7 +6048,11 @@
                     <a:bodyPr/>
                     <a:lstStyle/>
                     <a:p>
-                      <a:endParaRPr lang="en-GB"/>
+                      <a:endParaRPr lang="en-GB">
+                        <a:solidFill>
+                          <a:schemeClr val="bg1"/>
+                        </a:solidFill>
+                      </a:endParaRPr>
                     </a:p>
                   </a:txBody>
                   <a:tcPr>
@@ -5738,7 +6067,11 @@
                     <a:lstStyle/>
                     <a:p>
                       <a:r>
-                        <a:rPr lang="en-GB" dirty="0"/>
+                        <a:rPr lang="en-GB" dirty="0">
+                          <a:solidFill>
+                            <a:schemeClr val="bg1"/>
+                          </a:solidFill>
+                        </a:rPr>
                         <a:t>X</a:t>
                       </a:r>
                     </a:p>
@@ -5755,7 +6088,11 @@
                     <a:lstStyle/>
                     <a:p>
                       <a:r>
-                        <a:rPr lang="en-GB" dirty="0"/>
+                        <a:rPr lang="en-GB" dirty="0">
+                          <a:solidFill>
+                            <a:schemeClr val="bg1"/>
+                          </a:solidFill>
+                        </a:rPr>
                         <a:t>X</a:t>
                       </a:r>
                     </a:p>
@@ -5811,7 +6148,11 @@
                     <a:bodyPr/>
                     <a:lstStyle/>
                     <a:p>
-                      <a:endParaRPr lang="en-GB" dirty="0"/>
+                      <a:endParaRPr lang="en-GB" dirty="0">
+                        <a:solidFill>
+                          <a:schemeClr val="bg1"/>
+                        </a:solidFill>
+                      </a:endParaRPr>
                     </a:p>
                   </a:txBody>
                   <a:tcPr>
@@ -5825,7 +6166,11 @@
                     <a:bodyPr/>
                     <a:lstStyle/>
                     <a:p>
-                      <a:endParaRPr lang="en-GB"/>
+                      <a:endParaRPr lang="en-GB">
+                        <a:solidFill>
+                          <a:schemeClr val="bg1"/>
+                        </a:solidFill>
+                      </a:endParaRPr>
                     </a:p>
                   </a:txBody>
                   <a:tcPr>
@@ -5840,7 +6185,11 @@
                     <a:lstStyle/>
                     <a:p>
                       <a:r>
-                        <a:rPr lang="en-GB" dirty="0"/>
+                        <a:rPr lang="en-GB" dirty="0">
+                          <a:solidFill>
+                            <a:schemeClr val="bg1"/>
+                          </a:solidFill>
+                        </a:rPr>
                         <a:t>X</a:t>
                       </a:r>
                     </a:p>
@@ -5856,7 +6205,11 @@
                     <a:bodyPr/>
                     <a:lstStyle/>
                     <a:p>
-                      <a:endParaRPr lang="en-GB" dirty="0"/>
+                      <a:endParaRPr lang="en-GB" dirty="0">
+                        <a:solidFill>
+                          <a:schemeClr val="bg1"/>
+                        </a:solidFill>
+                      </a:endParaRPr>
                     </a:p>
                   </a:txBody>
                   <a:tcPr>
@@ -5871,7 +6224,11 @@
                     <a:lstStyle/>
                     <a:p>
                       <a:r>
-                        <a:rPr lang="en-GB" dirty="0"/>
+                        <a:rPr lang="en-GB" dirty="0">
+                          <a:solidFill>
+                            <a:schemeClr val="bg1"/>
+                          </a:solidFill>
+                        </a:rPr>
                         <a:t>X</a:t>
                       </a:r>
                     </a:p>
@@ -5927,7 +6284,11 @@
                     <a:bodyPr/>
                     <a:lstStyle/>
                     <a:p>
-                      <a:endParaRPr lang="en-GB" dirty="0"/>
+                      <a:endParaRPr lang="en-GB" dirty="0">
+                        <a:solidFill>
+                          <a:schemeClr val="bg1"/>
+                        </a:solidFill>
+                      </a:endParaRPr>
                     </a:p>
                   </a:txBody>
                   <a:tcPr>
@@ -5942,7 +6303,11 @@
                     <a:lstStyle/>
                     <a:p>
                       <a:r>
-                        <a:rPr lang="en-GB" dirty="0"/>
+                        <a:rPr lang="en-GB" dirty="0">
+                          <a:solidFill>
+                            <a:schemeClr val="bg1"/>
+                          </a:solidFill>
+                        </a:rPr>
                         <a:t>X</a:t>
                       </a:r>
                     </a:p>
@@ -5958,7 +6323,11 @@
                     <a:bodyPr/>
                     <a:lstStyle/>
                     <a:p>
-                      <a:endParaRPr lang="en-GB" dirty="0"/>
+                      <a:endParaRPr lang="en-GB" dirty="0">
+                        <a:solidFill>
+                          <a:schemeClr val="bg1"/>
+                        </a:solidFill>
+                      </a:endParaRPr>
                     </a:p>
                   </a:txBody>
                   <a:tcPr>
@@ -5973,7 +6342,11 @@
                     <a:lstStyle/>
                     <a:p>
                       <a:r>
-                        <a:rPr lang="en-GB" dirty="0"/>
+                        <a:rPr lang="en-GB" dirty="0">
+                          <a:solidFill>
+                            <a:schemeClr val="bg1"/>
+                          </a:solidFill>
+                        </a:rPr>
                         <a:t>X</a:t>
                       </a:r>
                     </a:p>
@@ -5989,7 +6362,11 @@
                     <a:bodyPr/>
                     <a:lstStyle/>
                     <a:p>
-                      <a:endParaRPr lang="en-GB" dirty="0"/>
+                      <a:endParaRPr lang="en-GB" dirty="0">
+                        <a:solidFill>
+                          <a:schemeClr val="bg1"/>
+                        </a:solidFill>
+                      </a:endParaRPr>
                     </a:p>
                   </a:txBody>
                   <a:tcPr>
@@ -6044,7 +6421,11 @@
                     <a:lstStyle/>
                     <a:p>
                       <a:r>
-                        <a:rPr lang="en-GB" dirty="0"/>
+                        <a:rPr lang="en-GB" dirty="0">
+                          <a:solidFill>
+                            <a:schemeClr val="bg1"/>
+                          </a:solidFill>
+                        </a:rPr>
                         <a:t>X</a:t>
                       </a:r>
                     </a:p>
@@ -6060,7 +6441,11 @@
                     <a:bodyPr/>
                     <a:lstStyle/>
                     <a:p>
-                      <a:endParaRPr lang="en-GB" dirty="0"/>
+                      <a:endParaRPr lang="en-GB" dirty="0">
+                        <a:solidFill>
+                          <a:schemeClr val="bg1"/>
+                        </a:solidFill>
+                      </a:endParaRPr>
                     </a:p>
                   </a:txBody>
                   <a:tcPr>
@@ -6075,7 +6460,11 @@
                     <a:lstStyle/>
                     <a:p>
                       <a:r>
-                        <a:rPr lang="en-GB" dirty="0"/>
+                        <a:rPr lang="en-GB" dirty="0">
+                          <a:solidFill>
+                            <a:schemeClr val="bg1"/>
+                          </a:solidFill>
+                        </a:rPr>
                         <a:t>X</a:t>
                       </a:r>
                     </a:p>
@@ -6091,7 +6480,11 @@
                     <a:bodyPr/>
                     <a:lstStyle/>
                     <a:p>
-                      <a:endParaRPr lang="en-GB" dirty="0"/>
+                      <a:endParaRPr lang="en-GB" dirty="0">
+                        <a:solidFill>
+                          <a:schemeClr val="bg1"/>
+                        </a:solidFill>
+                      </a:endParaRPr>
                     </a:p>
                   </a:txBody>
                   <a:tcPr>
@@ -6105,7 +6498,11 @@
                     <a:bodyPr/>
                     <a:lstStyle/>
                     <a:p>
-                      <a:endParaRPr lang="en-GB" dirty="0"/>
+                      <a:endParaRPr lang="en-GB" dirty="0">
+                        <a:solidFill>
+                          <a:schemeClr val="bg1"/>
+                        </a:solidFill>
+                      </a:endParaRPr>
                     </a:p>
                   </a:txBody>
                   <a:tcPr>
@@ -6120,6 +6517,142 @@
                 <a:extLst>
                   <a:ext uri="{0D108BD9-81ED-4DB2-BD59-A6C34878D82A}">
                     <a16:rowId xmlns:a16="http://schemas.microsoft.com/office/drawing/2014/main" val="2860863937"/>
+                  </a:ext>
+                </a:extLst>
+              </a:tr>
+              <a:tr h="370840">
+                <a:tc>
+                  <a:txBody>
+                    <a:bodyPr/>
+                    <a:lstStyle/>
+                    <a:p>
+                      <a:pPr marL="0" marR="0" lvl="0" indent="0" algn="l" defTabSz="914400" rtl="0" eaLnBrk="1" fontAlgn="auto" latinLnBrk="0" hangingPunct="1">
+                        <a:lnSpc>
+                          <a:spcPct val="100000"/>
+                        </a:lnSpc>
+                        <a:spcBef>
+                          <a:spcPts val="0"/>
+                        </a:spcBef>
+                        <a:spcAft>
+                          <a:spcPts val="0"/>
+                        </a:spcAft>
+                        <a:buClrTx/>
+                        <a:buSzTx/>
+                        <a:buFontTx/>
+                        <a:buNone/>
+                        <a:tabLst/>
+                        <a:defRPr/>
+                      </a:pPr>
+                      <a:r>
+                        <a:rPr lang="en-GB" dirty="0"/>
+                        <a:t>Mute Drum Track</a:t>
+                      </a:r>
+                    </a:p>
+                  </a:txBody>
+                  <a:tcPr/>
+                </a:tc>
+                <a:tc>
+                  <a:txBody>
+                    <a:bodyPr/>
+                    <a:lstStyle/>
+                    <a:p>
+                      <a:r>
+                        <a:rPr lang="en-GB" dirty="0">
+                          <a:solidFill>
+                            <a:schemeClr val="bg1"/>
+                          </a:solidFill>
+                        </a:rPr>
+                        <a:t>X</a:t>
+                      </a:r>
+                    </a:p>
+                  </a:txBody>
+                  <a:tcPr>
+                    <a:solidFill>
+                      <a:schemeClr val="accent6"/>
+                    </a:solidFill>
+                  </a:tcPr>
+                </a:tc>
+                <a:tc>
+                  <a:txBody>
+                    <a:bodyPr/>
+                    <a:lstStyle/>
+                    <a:p>
+                      <a:endParaRPr lang="en-GB" dirty="0">
+                        <a:solidFill>
+                          <a:schemeClr val="bg1"/>
+                        </a:solidFill>
+                      </a:endParaRPr>
+                    </a:p>
+                  </a:txBody>
+                  <a:tcPr>
+                    <a:solidFill>
+                      <a:srgbClr val="C00000"/>
+                    </a:solidFill>
+                  </a:tcPr>
+                </a:tc>
+                <a:tc>
+                  <a:txBody>
+                    <a:bodyPr/>
+                    <a:lstStyle/>
+                    <a:p>
+                      <a:endParaRPr lang="en-GB" dirty="0">
+                        <a:solidFill>
+                          <a:schemeClr val="bg1"/>
+                        </a:solidFill>
+                      </a:endParaRPr>
+                    </a:p>
+                  </a:txBody>
+                  <a:tcPr>
+                    <a:solidFill>
+                      <a:srgbClr val="FFC000"/>
+                    </a:solidFill>
+                  </a:tcPr>
+                </a:tc>
+                <a:tc>
+                  <a:txBody>
+                    <a:bodyPr/>
+                    <a:lstStyle/>
+                    <a:p>
+                      <a:r>
+                        <a:rPr lang="en-GB" dirty="0">
+                          <a:solidFill>
+                            <a:schemeClr val="bg1"/>
+                          </a:solidFill>
+                        </a:rPr>
+                        <a:t>X</a:t>
+                      </a:r>
+                    </a:p>
+                  </a:txBody>
+                  <a:tcPr>
+                    <a:solidFill>
+                      <a:srgbClr val="0070C0"/>
+                    </a:solidFill>
+                  </a:tcPr>
+                </a:tc>
+                <a:tc>
+                  <a:txBody>
+                    <a:bodyPr/>
+                    <a:lstStyle/>
+                    <a:p>
+                      <a:endParaRPr lang="en-GB" dirty="0">
+                        <a:solidFill>
+                          <a:schemeClr val="bg1"/>
+                        </a:solidFill>
+                      </a:endParaRPr>
+                    </a:p>
+                  </a:txBody>
+                  <a:tcPr>
+                    <a:solidFill>
+                      <a:schemeClr val="accent2">
+                        <a:lumMod val="60000"/>
+                        <a:lumOff val="40000"/>
+                      </a:schemeClr>
+                    </a:solidFill>
+                  </a:tcPr>
+                </a:tc>
+                <a:extLst>
+                  <a:ext uri="{0D108BD9-81ED-4DB2-BD59-A6C34878D82A}">
+                    <a16:rowId xmlns:a16="http://schemas.microsoft.com/office/drawing/2014/main" val="2356920461"/>
                   </a:ext>
                 </a:extLst>
               </a:tr>
@@ -6159,7 +6692,11 @@
                     <a:bodyPr/>
                     <a:lstStyle/>
                     <a:p>
-                      <a:endParaRPr lang="en-GB" dirty="0"/>
+                      <a:endParaRPr lang="en-GB" dirty="0">
+                        <a:solidFill>
+                          <a:schemeClr val="bg1"/>
+                        </a:solidFill>
+                      </a:endParaRPr>
                     </a:p>
                   </a:txBody>
                   <a:tcPr>
@@ -6174,7 +6711,11 @@
                     <a:lstStyle/>
                     <a:p>
                       <a:r>
-                        <a:rPr lang="en-GB" dirty="0"/>
+                        <a:rPr lang="en-GB" dirty="0">
+                          <a:solidFill>
+                            <a:schemeClr val="bg1"/>
+                          </a:solidFill>
+                        </a:rPr>
                         <a:t>X</a:t>
                       </a:r>
                     </a:p>
@@ -6191,7 +6732,11 @@
                     <a:lstStyle/>
                     <a:p>
                       <a:r>
-                        <a:rPr lang="en-GB" dirty="0"/>
+                        <a:rPr lang="en-GB" dirty="0">
+                          <a:solidFill>
+                            <a:schemeClr val="bg1"/>
+                          </a:solidFill>
+                        </a:rPr>
                         <a:t>X</a:t>
                       </a:r>
                     </a:p>
@@ -6208,7 +6753,11 @@
                     <a:lstStyle/>
                     <a:p>
                       <a:r>
-                        <a:rPr lang="en-GB" dirty="0"/>
+                        <a:rPr lang="en-GB" dirty="0">
+                          <a:solidFill>
+                            <a:schemeClr val="bg1"/>
+                          </a:solidFill>
+                        </a:rPr>
                         <a:t>X</a:t>
                       </a:r>
                     </a:p>
@@ -6224,7 +6773,11 @@
                     <a:bodyPr/>
                     <a:lstStyle/>
                     <a:p>
-                      <a:endParaRPr lang="en-GB" dirty="0"/>
+                      <a:endParaRPr lang="en-GB" dirty="0">
+                        <a:solidFill>
+                          <a:schemeClr val="bg1"/>
+                        </a:solidFill>
+                      </a:endParaRPr>
                     </a:p>
                   </a:txBody>
                   <a:tcPr>
@@ -6239,6 +6792,142 @@
                 <a:extLst>
                   <a:ext uri="{0D108BD9-81ED-4DB2-BD59-A6C34878D82A}">
                     <a16:rowId xmlns:a16="http://schemas.microsoft.com/office/drawing/2014/main" val="3668205319"/>
+                  </a:ext>
+                </a:extLst>
+              </a:tr>
+              <a:tr h="370840">
+                <a:tc>
+                  <a:txBody>
+                    <a:bodyPr/>
+                    <a:lstStyle/>
+                    <a:p>
+                      <a:pPr marL="0" marR="0" lvl="0" indent="0" algn="l" defTabSz="914400" rtl="0" eaLnBrk="1" fontAlgn="auto" latinLnBrk="0" hangingPunct="1">
+                        <a:lnSpc>
+                          <a:spcPct val="100000"/>
+                        </a:lnSpc>
+                        <a:spcBef>
+                          <a:spcPts val="0"/>
+                        </a:spcBef>
+                        <a:spcAft>
+                          <a:spcPts val="0"/>
+                        </a:spcAft>
+                        <a:buClrTx/>
+                        <a:buSzTx/>
+                        <a:buFontTx/>
+                        <a:buNone/>
+                        <a:tabLst/>
+                        <a:defRPr/>
+                      </a:pPr>
+                      <a:r>
+                        <a:rPr lang="en-GB" dirty="0"/>
+                        <a:t>Staccato Mode</a:t>
+                      </a:r>
+                    </a:p>
+                  </a:txBody>
+                  <a:tcPr/>
+                </a:tc>
+                <a:tc>
+                  <a:txBody>
+                    <a:bodyPr/>
+                    <a:lstStyle/>
+                    <a:p>
+                      <a:endParaRPr lang="en-GB" dirty="0">
+                        <a:solidFill>
+                          <a:schemeClr val="bg1"/>
+                        </a:solidFill>
+                      </a:endParaRPr>
+                    </a:p>
+                  </a:txBody>
+                  <a:tcPr>
+                    <a:solidFill>
+                      <a:schemeClr val="accent6"/>
+                    </a:solidFill>
+                  </a:tcPr>
+                </a:tc>
+                <a:tc>
+                  <a:txBody>
+                    <a:bodyPr/>
+                    <a:lstStyle/>
+                    <a:p>
+                      <a:r>
+                        <a:rPr lang="en-GB" dirty="0">
+                          <a:solidFill>
+                            <a:schemeClr val="bg1"/>
+                          </a:solidFill>
+                        </a:rPr>
+                        <a:t>X</a:t>
+                      </a:r>
+                    </a:p>
+                  </a:txBody>
+                  <a:tcPr>
+                    <a:solidFill>
+                      <a:srgbClr val="C00000"/>
+                    </a:solidFill>
+                  </a:tcPr>
+                </a:tc>
+                <a:tc>
+                  <a:txBody>
+                    <a:bodyPr/>
+                    <a:lstStyle/>
+                    <a:p>
+                      <a:endParaRPr lang="en-GB" dirty="0">
+                        <a:solidFill>
+                          <a:schemeClr val="bg1"/>
+                        </a:solidFill>
+                      </a:endParaRPr>
+                    </a:p>
+                  </a:txBody>
+                  <a:tcPr>
+                    <a:solidFill>
+                      <a:srgbClr val="FFC000"/>
+                    </a:solidFill>
+                  </a:tcPr>
+                </a:tc>
+                <a:tc>
+                  <a:txBody>
+                    <a:bodyPr/>
+                    <a:lstStyle/>
+                    <a:p>
+                      <a:endParaRPr lang="en-GB" dirty="0">
+                        <a:solidFill>
+                          <a:schemeClr val="bg1"/>
+                        </a:solidFill>
+                      </a:endParaRPr>
+                    </a:p>
+                  </a:txBody>
+                  <a:tcPr>
+                    <a:solidFill>
+                      <a:srgbClr val="0070C0"/>
+                    </a:solidFill>
+                  </a:tcPr>
+                </a:tc>
+                <a:tc>
+                  <a:txBody>
+                    <a:bodyPr/>
+                    <a:lstStyle/>
+                    <a:p>
+                      <a:r>
+                        <a:rPr lang="en-GB" dirty="0">
+                          <a:solidFill>
+                            <a:schemeClr val="bg1"/>
+                          </a:solidFill>
+                        </a:rPr>
+                        <a:t>X</a:t>
+                      </a:r>
+                    </a:p>
+                  </a:txBody>
+                  <a:tcPr>
+                    <a:solidFill>
+                      <a:schemeClr val="accent2">
+                        <a:lumMod val="60000"/>
+                        <a:lumOff val="40000"/>
+                      </a:schemeClr>
+                    </a:solidFill>
+                  </a:tcPr>
+                </a:tc>
+                <a:extLst>
+                  <a:ext uri="{0D108BD9-81ED-4DB2-BD59-A6C34878D82A}">
+                    <a16:rowId xmlns:a16="http://schemas.microsoft.com/office/drawing/2014/main" val="2360498238"/>
                   </a:ext>
                 </a:extLst>
               </a:tr>
